--- a/public/previews/v1/weather-and-clothes.pptx
+++ b/public/previews/v1/weather-and-clothes.pptx
@@ -5,7 +5,7 @@
     <p:sldMasterId id="2147483648" r:id="rId1"/>
   </p:sldMasterIdLst>
   <p:notesMasterIdLst>
-    <p:notesMasterId r:id="rId29"/>
+    <p:notesMasterId r:id="rId30"/>
   </p:notesMasterIdLst>
   <p:sldIdLst>
     <p:sldId id="256" r:id="rId2"/>
@@ -35,6 +35,7 @@
     <p:sldId id="280" r:id="rId26"/>
     <p:sldId id="281" r:id="rId27"/>
     <p:sldId id="282" r:id="rId28"/>
+    <p:sldId id="283" r:id="rId29"/>
   </p:sldIdLst>
   <p:sldSz cx="9144000" cy="5143500"/>
   <p:notesSz cx="5143500" cy="9144000"/>
@@ -2224,6 +2225,94 @@
             <a:fld id="{F7021451-1387-4CA6-816F-3879F97B5CBC}" type="slidenum">
               <a:rPr lang="en-US"/>
               <a:t>27</a:t>
+            </a:fld>
+            <a:endParaRPr lang="en-US"/>
+          </a:p>
+        </p:txBody>
+      </p:sp>
+    </p:spTree>
+    <p:extLst>
+      <p:ext uri="{BB962C8B-B14F-4D97-AF65-F5344CB8AC3E}">
+        <p14:creationId xmlns:p14="http://schemas.microsoft.com/office/powerpoint/2010/main" val="1024086991"/>
+      </p:ext>
+    </p:extLst>
+  </p:cSld>
+  <p:clrMapOvr>
+    <a:masterClrMapping/>
+  </p:clrMapOvr>
+</p:notes>
+</file>
+
+<file path=ppt/notesSlides/notesSlide28.xml><?xml version="1.0" encoding="utf-8"?>
+<p:notes xmlns:a="http://schemas.openxmlformats.org/drawingml/2006/main" xmlns:r="http://schemas.openxmlformats.org/officeDocument/2006/relationships" xmlns:p="http://schemas.openxmlformats.org/presentationml/2006/main">
+  <p:cSld>
+    <p:spTree>
+      <p:nvGrpSpPr>
+        <p:cNvPr id="1" name=""/>
+        <p:cNvGrpSpPr/>
+        <p:nvPr/>
+      </p:nvGrpSpPr>
+      <p:grpSpPr>
+        <a:xfrm>
+          <a:off x="0" y="0"/>
+          <a:ext cx="0" cy="0"/>
+          <a:chOff x="0" y="0"/>
+          <a:chExt cx="0" cy="0"/>
+        </a:xfrm>
+      </p:grpSpPr>
+      <p:sp>
+        <p:nvSpPr>
+          <p:cNvPr id="2" name="Slide Image Placeholder 1"/>
+          <p:cNvSpPr>
+            <a:spLocks noGrp="1" noRot="1" noChangeAspect="1"/>
+          </p:cNvSpPr>
+          <p:nvPr>
+            <p:ph type="sldImg"/>
+          </p:nvPr>
+        </p:nvSpPr>
+        <p:spPr/>
+      </p:sp>
+      <p:sp>
+        <p:nvSpPr>
+          <p:cNvPr id="3" name="Notes Placeholder 2"/>
+          <p:cNvSpPr>
+            <a:spLocks noGrp="1"/>
+          </p:cNvSpPr>
+          <p:nvPr>
+            <p:ph type="body" idx="1"/>
+          </p:nvPr>
+        </p:nvSpPr>
+        <p:spPr/>
+        <p:txBody>
+          <a:bodyPr/>
+          <a:lstStyle/>
+          <a:p>
+            <a:r>
+              <a:rPr lang="en-US" dirty="0"/>
+              <a:t/>
+            </a:r>
+            <a:endParaRPr lang="en-US" dirty="0"/>
+          </a:p>
+        </p:txBody>
+      </p:sp>
+      <p:sp>
+        <p:nvSpPr>
+          <p:cNvPr id="4" name="Slide Number Placeholder 3"/>
+          <p:cNvSpPr>
+            <a:spLocks noGrp="1"/>
+          </p:cNvSpPr>
+          <p:nvPr>
+            <p:ph type="sldNum" sz="quarter" idx="10"/>
+          </p:nvPr>
+        </p:nvSpPr>
+        <p:spPr/>
+        <p:txBody>
+          <a:bodyPr/>
+          <a:lstStyle/>
+          <a:p>
+            <a:fld id="{F7021451-1387-4CA6-816F-3879F97B5CBC}" type="slidenum">
+              <a:rPr lang="en-US"/>
+              <a:t>28</a:t>
             </a:fld>
             <a:endParaRPr lang="en-US"/>
           </a:p>
@@ -3417,7 +3506,7 @@
                 <a:ea typeface="Trebuchet MS" pitchFamily="34" charset="-122"/>
                 <a:cs typeface="Trebuchet MS" pitchFamily="34" charset="-120"/>
               </a:rPr>
-              <a:t>Listen for details</a:t>
+              <a:t>Read and notice</a:t>
             </a:r>
             <a:endParaRPr lang="en-US" sz="2400" dirty="0"/>
           </a:p>
@@ -3484,7 +3573,7 @@
                 <a:ea typeface="Verdana" pitchFamily="34" charset="-122"/>
                 <a:cs typeface="Verdana" pitchFamily="34" charset="-120"/>
               </a:rPr>
-              <a:t>A Walk with Leo</a:t>
+              <a:t>Mia Gets Ready</a:t>
             </a:r>
             <a:endParaRPr lang="en-US" sz="1800" dirty="0"/>
           </a:p>
@@ -3548,7 +3637,7 @@
                 <a:ea typeface="Verdana" pitchFamily="34" charset="-122"/>
                 <a:cs typeface="Verdana" pitchFamily="34" charset="-120"/>
               </a:rPr>
-              <a:t>Listen. Then answer.</a:t>
+              <a:t>What does Mia see first?</a:t>
             </a:r>
             <a:endParaRPr lang="en-US" sz="1200" dirty="0"/>
           </a:p>
@@ -3680,7 +3769,7 @@
                 <a:ea typeface="Trebuchet MS" pitchFamily="34" charset="-122"/>
                 <a:cs typeface="Trebuchet MS" pitchFamily="34" charset="-120"/>
               </a:rPr>
-              <a:t>Useful language</a:t>
+              <a:t>Listen for details</a:t>
             </a:r>
             <a:endParaRPr lang="en-US" sz="2400" dirty="0"/>
           </a:p>
@@ -3747,7 +3836,7 @@
                 <a:ea typeface="Verdana" pitchFamily="34" charset="-122"/>
                 <a:cs typeface="Verdana" pitchFamily="34" charset="-120"/>
               </a:rPr>
-              <a:t>I see the ___.</a:t>
+              <a:t>A Walk with Leo</a:t>
             </a:r>
             <a:endParaRPr lang="en-US" sz="1800" dirty="0"/>
           </a:p>
@@ -3811,7 +3900,7 @@
                 <a:ea typeface="Verdana" pitchFamily="34" charset="-122"/>
                 <a:cs typeface="Verdana" pitchFamily="34" charset="-120"/>
               </a:rPr>
-              <a:t>Say a sentence.</a:t>
+              <a:t>Listen. Then answer.</a:t>
             </a:r>
             <a:endParaRPr lang="en-US" sz="1200" dirty="0"/>
           </a:p>
@@ -4010,7 +4099,7 @@
                 <a:ea typeface="Verdana" pitchFamily="34" charset="-122"/>
                 <a:cs typeface="Verdana" pitchFamily="34" charset="-120"/>
               </a:rPr>
-              <a:t>I wear a ___.</a:t>
+              <a:t>I see the ___.</a:t>
             </a:r>
             <a:endParaRPr lang="en-US" sz="1800" dirty="0"/>
           </a:p>
@@ -4273,7 +4362,7 @@
                 <a:ea typeface="Verdana" pitchFamily="34" charset="-122"/>
                 <a:cs typeface="Verdana" pitchFamily="34" charset="-120"/>
               </a:rPr>
-              <a:t>I wear shoes on my feet.</a:t>
+              <a:t>I wear a ___.</a:t>
             </a:r>
             <a:endParaRPr lang="en-US" sz="1800" dirty="0"/>
           </a:p>
@@ -4469,7 +4558,7 @@
                 <a:ea typeface="Trebuchet MS" pitchFamily="34" charset="-122"/>
                 <a:cs typeface="Trebuchet MS" pitchFamily="34" charset="-120"/>
               </a:rPr>
-              <a:t>Pack for a walk · 1</a:t>
+              <a:t>Useful language</a:t>
             </a:r>
             <a:endParaRPr lang="en-US" sz="2400" dirty="0"/>
           </a:p>
@@ -4509,7 +4598,7 @@
         <p:spPr>
           <a:xfrm>
             <a:off x="777240" y="1417320"/>
-            <a:ext cx="7589520" cy="621792"/>
+            <a:ext cx="7589520" cy="310896"/>
           </a:xfrm>
           <a:prstGeom prst="rect">
             <a:avLst/>
@@ -4536,7 +4625,7 @@
                 <a:ea typeface="Verdana" pitchFamily="34" charset="-122"/>
                 <a:cs typeface="Verdana" pitchFamily="34" charset="-120"/>
               </a:rPr>
-              <a:t>A sunny walk: choose a picture that shades your head.</a:t>
+              <a:t>I wear shoes on my feet.</a:t>
             </a:r>
             <a:endParaRPr lang="en-US" sz="1800" dirty="0"/>
           </a:p>
@@ -4600,7 +4689,7 @@
                 <a:ea typeface="Verdana" pitchFamily="34" charset="-122"/>
                 <a:cs typeface="Verdana" pitchFamily="34" charset="-120"/>
               </a:rPr>
-              <a:t>Take turns.</a:t>
+              <a:t>Say a sentence.</a:t>
             </a:r>
             <a:endParaRPr lang="en-US" sz="1200" dirty="0"/>
           </a:p>
@@ -4732,7 +4821,7 @@
                 <a:ea typeface="Trebuchet MS" pitchFamily="34" charset="-122"/>
                 <a:cs typeface="Trebuchet MS" pitchFamily="34" charset="-120"/>
               </a:rPr>
-              <a:t>Pack for a walk · 2</a:t>
+              <a:t>Pack for a walk · 1</a:t>
             </a:r>
             <a:endParaRPr lang="en-US" sz="2400" dirty="0"/>
           </a:p>
@@ -4799,7 +4888,7 @@
                 <a:ea typeface="Verdana" pitchFamily="34" charset="-122"/>
                 <a:cs typeface="Verdana" pitchFamily="34" charset="-120"/>
               </a:rPr>
-              <a:t>Getting dressed: choose a picture for your feet.</a:t>
+              <a:t>A sunny walk: choose a picture that shades your head.</a:t>
             </a:r>
             <a:endParaRPr lang="en-US" sz="1800" dirty="0"/>
           </a:p>
@@ -4995,7 +5084,7 @@
                 <a:ea typeface="Trebuchet MS" pitchFamily="34" charset="-122"/>
                 <a:cs typeface="Trebuchet MS" pitchFamily="34" charset="-120"/>
               </a:rPr>
-              <a:t>Pack for a walk · 3</a:t>
+              <a:t>Pack for a walk · 2</a:t>
             </a:r>
             <a:endParaRPr lang="en-US" sz="2400" dirty="0"/>
           </a:p>
@@ -5062,7 +5151,7 @@
                 <a:ea typeface="Verdana" pitchFamily="34" charset="-122"/>
                 <a:cs typeface="Verdana" pitchFamily="34" charset="-120"/>
               </a:rPr>
-              <a:t>Rain starts: decide where to wait safely.</a:t>
+              <a:t>Getting dressed: choose a picture for your feet.</a:t>
             </a:r>
             <a:endParaRPr lang="en-US" sz="1800" dirty="0"/>
           </a:p>
@@ -5258,7 +5347,7 @@
                 <a:ea typeface="Trebuchet MS" pitchFamily="34" charset="-122"/>
                 <a:cs typeface="Trebuchet MS" pitchFamily="34" charset="-120"/>
               </a:rPr>
-              <a:t>Your final response</a:t>
+              <a:t>Pack for a walk · 3</a:t>
             </a:r>
             <a:endParaRPr lang="en-US" sz="2400" dirty="0"/>
           </a:p>
@@ -5298,7 +5387,7 @@
         <p:spPr>
           <a:xfrm>
             <a:off x="777240" y="1417320"/>
-            <a:ext cx="7589520" cy="310896"/>
+            <a:ext cx="7589520" cy="621792"/>
           </a:xfrm>
           <a:prstGeom prst="rect">
             <a:avLst/>
@@ -5325,7 +5414,7 @@
                 <a:ea typeface="Verdana" pitchFamily="34" charset="-122"/>
                 <a:cs typeface="Verdana" pitchFamily="34" charset="-120"/>
               </a:rPr>
-              <a:t>Name two things you wear.</a:t>
+              <a:t>Rain starts: decide where to wait safely.</a:t>
             </a:r>
             <a:endParaRPr lang="en-US" sz="1800" dirty="0"/>
           </a:p>
@@ -5389,7 +5478,7 @@
                 <a:ea typeface="Verdana" pitchFamily="34" charset="-122"/>
                 <a:cs typeface="Verdana" pitchFamily="34" charset="-120"/>
               </a:rPr>
-              <a:t>Say it by yourself.</a:t>
+              <a:t>Take turns.</a:t>
             </a:r>
             <a:endParaRPr lang="en-US" sz="1200" dirty="0"/>
           </a:p>
@@ -5466,30 +5555,237 @@
           <a:chExt cx="0" cy="0"/>
         </a:xfrm>
       </p:grpSpPr>
-      <p:pic>
-        <p:nvPicPr>
-          <p:cNvPr id="2" name="Image 0" descr="preencoded.png">    </p:cNvPr>
-          <p:cNvPicPr>
-            <a:picLocks noChangeAspect="1"/>
-          </p:cNvPicPr>
-          <p:nvPr/>
-        </p:nvPicPr>
-        <p:blipFill>
-          <a:blip r:embed="rId1"/>
-          <a:stretch>
-            <a:fillRect/>
-          </a:stretch>
-        </p:blipFill>
-        <p:spPr>
-          <a:xfrm>
-            <a:off x="2651760" y="640080"/>
-            <a:ext cx="3840480" cy="3840480"/>
-          </a:xfrm>
-          <a:prstGeom prst="rect">
-            <a:avLst/>
-          </a:prstGeom>
-        </p:spPr>
-      </p:pic>
+      <p:sp>
+        <p:nvSpPr>
+          <p:cNvPr id="2" name="Shape 0"/>
+          <p:cNvSpPr/>
+          <p:nvPr/>
+        </p:nvSpPr>
+        <p:spPr>
+          <a:xfrm>
+            <a:off x="0" y="0"/>
+            <a:ext cx="9144000" cy="164592"/>
+          </a:xfrm>
+          <a:prstGeom prst="rect">
+            <a:avLst/>
+          </a:prstGeom>
+          <a:solidFill>
+            <a:srgbClr val="F4A300"/>
+          </a:solidFill>
+          <a:ln/>
+        </p:spPr>
+      </p:sp>
+      <p:sp>
+        <p:nvSpPr>
+          <p:cNvPr id="3" name="Text 1"/>
+          <p:cNvSpPr/>
+          <p:nvPr/>
+        </p:nvSpPr>
+        <p:spPr>
+          <a:xfrm>
+            <a:off x="502920" y="347472"/>
+            <a:ext cx="7680960" cy="777240"/>
+          </a:xfrm>
+          <a:prstGeom prst="rect">
+            <a:avLst/>
+          </a:prstGeom>
+          <a:noFill/>
+          <a:ln/>
+        </p:spPr>
+        <p:txBody>
+          <a:bodyPr wrap="square" rtlCol="0" anchor="ctr">
+            <a:normAutofit/>
+          </a:bodyPr>
+          <a:lstStyle/>
+          <a:p>
+            <a:pPr indent="0" marL="0">
+              <a:buNone/>
+            </a:pPr>
+            <a:r>
+              <a:rPr lang="en-US" sz="2400" b="1" dirty="0">
+                <a:solidFill>
+                  <a:srgbClr val="0B4F6C"/>
+                </a:solidFill>
+                <a:latin typeface="Trebuchet MS" pitchFamily="34" charset="0"/>
+                <a:ea typeface="Trebuchet MS" pitchFamily="34" charset="-122"/>
+                <a:cs typeface="Trebuchet MS" pitchFamily="34" charset="-120"/>
+              </a:rPr>
+              <a:t>Your final response</a:t>
+            </a:r>
+            <a:endParaRPr lang="en-US" sz="2400" dirty="0"/>
+          </a:p>
+        </p:txBody>
+      </p:sp>
+      <p:sp>
+        <p:nvSpPr>
+          <p:cNvPr id="4" name="Shape 2"/>
+          <p:cNvSpPr/>
+          <p:nvPr/>
+        </p:nvSpPr>
+        <p:spPr>
+          <a:xfrm>
+            <a:off x="502920" y="1234440"/>
+            <a:ext cx="8138160" cy="2606040"/>
+          </a:xfrm>
+          <a:prstGeom prst="rect">
+            <a:avLst/>
+          </a:prstGeom>
+          <a:solidFill>
+            <a:srgbClr val="F2FAFF"/>
+          </a:solidFill>
+          <a:ln w="12700">
+            <a:solidFill>
+              <a:srgbClr val="F2FAFF"/>
+            </a:solidFill>
+            <a:prstDash val="solid"/>
+          </a:ln>
+        </p:spPr>
+      </p:sp>
+      <p:sp>
+        <p:nvSpPr>
+          <p:cNvPr id="5" name="Text 3"/>
+          <p:cNvSpPr/>
+          <p:nvPr/>
+        </p:nvSpPr>
+        <p:spPr>
+          <a:xfrm>
+            <a:off x="777240" y="1417320"/>
+            <a:ext cx="7589520" cy="310896"/>
+          </a:xfrm>
+          <a:prstGeom prst="rect">
+            <a:avLst/>
+          </a:prstGeom>
+          <a:noFill/>
+          <a:ln/>
+        </p:spPr>
+        <p:txBody>
+          <a:bodyPr wrap="square" lIns="0" tIns="0" rIns="0" bIns="0" rtlCol="0" anchor="t"/>
+          <a:lstStyle/>
+          <a:p>
+            <a:pPr algn="just" indent="0" marL="0">
+              <a:lnSpc>
+                <a:spcPct val="100000"/>
+              </a:lnSpc>
+              <a:buNone/>
+            </a:pPr>
+            <a:r>
+              <a:rPr lang="en-US" sz="1800" dirty="0">
+                <a:solidFill>
+                  <a:srgbClr val="20303A"/>
+                </a:solidFill>
+                <a:latin typeface="Verdana" pitchFamily="34" charset="0"/>
+                <a:ea typeface="Verdana" pitchFamily="34" charset="-122"/>
+                <a:cs typeface="Verdana" pitchFamily="34" charset="-120"/>
+              </a:rPr>
+              <a:t>Name two things you wear.</a:t>
+            </a:r>
+            <a:endParaRPr lang="en-US" sz="1800" dirty="0"/>
+          </a:p>
+        </p:txBody>
+      </p:sp>
+      <p:sp>
+        <p:nvSpPr>
+          <p:cNvPr id="6" name="Shape 4"/>
+          <p:cNvSpPr/>
+          <p:nvPr/>
+        </p:nvSpPr>
+        <p:spPr>
+          <a:xfrm>
+            <a:off x="502920" y="4069080"/>
+            <a:ext cx="8138160" cy="685800"/>
+          </a:xfrm>
+          <a:prstGeom prst="roundRect">
+            <a:avLst/>
+          </a:prstGeom>
+          <a:solidFill>
+            <a:srgbClr val="FFF3D6"/>
+          </a:solidFill>
+          <a:ln w="12700">
+            <a:solidFill>
+              <a:srgbClr val="F4A300"/>
+            </a:solidFill>
+            <a:prstDash val="solid"/>
+          </a:ln>
+        </p:spPr>
+      </p:sp>
+      <p:sp>
+        <p:nvSpPr>
+          <p:cNvPr id="7" name="Text 5"/>
+          <p:cNvSpPr/>
+          <p:nvPr/>
+        </p:nvSpPr>
+        <p:spPr>
+          <a:xfrm>
+            <a:off x="685800" y="4133088"/>
+            <a:ext cx="7772400" cy="566928"/>
+          </a:xfrm>
+          <a:prstGeom prst="rect">
+            <a:avLst/>
+          </a:prstGeom>
+          <a:noFill/>
+          <a:ln/>
+        </p:spPr>
+        <p:txBody>
+          <a:bodyPr wrap="square" lIns="0" tIns="0" rIns="0" bIns="0" rtlCol="0" anchor="ctr"/>
+          <a:lstStyle/>
+          <a:p>
+            <a:pPr algn="just" indent="0" marL="0">
+              <a:buNone/>
+            </a:pPr>
+            <a:r>
+              <a:rPr lang="en-US" sz="1200" b="1" dirty="0">
+                <a:solidFill>
+                  <a:srgbClr val="0B4F6C"/>
+                </a:solidFill>
+                <a:latin typeface="Verdana" pitchFamily="34" charset="0"/>
+                <a:ea typeface="Verdana" pitchFamily="34" charset="-122"/>
+                <a:cs typeface="Verdana" pitchFamily="34" charset="-120"/>
+              </a:rPr>
+              <a:t>Say it by yourself.</a:t>
+            </a:r>
+            <a:endParaRPr lang="en-US" sz="1200" dirty="0"/>
+          </a:p>
+        </p:txBody>
+      </p:sp>
+      <p:sp>
+        <p:nvSpPr>
+          <p:cNvPr id="8" name="Text 6"/>
+          <p:cNvSpPr/>
+          <p:nvPr/>
+        </p:nvSpPr>
+        <p:spPr>
+          <a:xfrm>
+            <a:off x="8458200" y="4732020"/>
+            <a:ext cx="457200" cy="292608"/>
+          </a:xfrm>
+          <a:prstGeom prst="rect">
+            <a:avLst/>
+          </a:prstGeom>
+          <a:noFill/>
+          <a:ln/>
+        </p:spPr>
+        <p:txBody>
+          <a:bodyPr wrap="square" rtlCol="0" anchor="ctr"/>
+          <a:lstStyle/>
+          <a:p>
+            <a:pPr algn="r" indent="0" marL="0">
+              <a:buNone/>
+            </a:pPr>
+            <a:r>
+              <a:rPr lang="en-US" sz="1100" dirty="0">
+                <a:solidFill>
+                  <a:srgbClr val="5B7280"/>
+                </a:solidFill>
+                <a:latin typeface="Verdana" pitchFamily="34" charset="0"/>
+                <a:ea typeface="Verdana" pitchFamily="34" charset="-122"/>
+                <a:cs typeface="Verdana" pitchFamily="34" charset="-120"/>
+              </a:rPr>
+              <a:t>17</a:t>
+            </a:r>
+            <a:endParaRPr lang="en-US" sz="1100" dirty="0"/>
+          </a:p>
+        </p:txBody>
+      </p:sp>
     </p:spTree>
   </p:cSld>
   <p:clrMapOvr>
@@ -5522,47 +5818,30 @@
           <a:chExt cx="0" cy="0"/>
         </a:xfrm>
       </p:grpSpPr>
-      <p:sp>
-        <p:nvSpPr>
-          <p:cNvPr id="2" name="Text 0"/>
-          <p:cNvSpPr/>
-          <p:nvPr/>
-        </p:nvSpPr>
-        <p:spPr>
-          <a:xfrm>
-            <a:off x="914400" y="1828800"/>
-            <a:ext cx="7315200" cy="1188720"/>
-          </a:xfrm>
-          <a:prstGeom prst="rect">
-            <a:avLst/>
-          </a:prstGeom>
-          <a:noFill/>
-          <a:ln/>
-        </p:spPr>
-        <p:txBody>
-          <a:bodyPr wrap="square" lIns="0" tIns="0" rIns="0" bIns="0" rtlCol="0" anchor="ctr">
-            <a:normAutofit/>
-          </a:bodyPr>
-          <a:lstStyle/>
-          <a:p>
-            <a:pPr algn="ctr" indent="0" marL="0">
-              <a:buNone/>
-            </a:pPr>
-            <a:r>
-              <a:rPr lang="en-US" sz="4400" b="1" dirty="0">
-                <a:solidFill>
-                  <a:srgbClr val="0B4F6C"/>
-                </a:solidFill>
-                <a:latin typeface="Verdana" pitchFamily="34" charset="0"/>
-                <a:ea typeface="Verdana" pitchFamily="34" charset="-122"/>
-                <a:cs typeface="Verdana" pitchFamily="34" charset="-120"/>
-              </a:rPr>
-              <a:t>Sun</a:t>
-            </a:r>
-            <a:endParaRPr lang="en-US" sz="4400" dirty="0"/>
-          </a:p>
-        </p:txBody>
-      </p:sp>
+      <p:pic>
+        <p:nvPicPr>
+          <p:cNvPr id="2" name="Image 0" descr="preencoded.png">    </p:cNvPr>
+          <p:cNvPicPr>
+            <a:picLocks noChangeAspect="1"/>
+          </p:cNvPicPr>
+          <p:nvPr/>
+        </p:nvPicPr>
+        <p:blipFill>
+          <a:blip r:embed="rId1"/>
+          <a:stretch>
+            <a:fillRect/>
+          </a:stretch>
+        </p:blipFill>
+        <p:spPr>
+          <a:xfrm>
+            <a:off x="2651760" y="640080"/>
+            <a:ext cx="3840480" cy="3840480"/>
+          </a:xfrm>
+          <a:prstGeom prst="rect">
+            <a:avLst/>
+          </a:prstGeom>
+        </p:spPr>
+      </p:pic>
     </p:spTree>
   </p:cSld>
   <p:clrMapOvr>
@@ -5942,30 +6221,47 @@
           <a:chExt cx="0" cy="0"/>
         </a:xfrm>
       </p:grpSpPr>
-      <p:pic>
-        <p:nvPicPr>
-          <p:cNvPr id="2" name="Image 0" descr="preencoded.png">    </p:cNvPr>
-          <p:cNvPicPr>
-            <a:picLocks noChangeAspect="1"/>
-          </p:cNvPicPr>
-          <p:nvPr/>
-        </p:nvPicPr>
-        <p:blipFill>
-          <a:blip r:embed="rId1"/>
-          <a:stretch>
-            <a:fillRect/>
-          </a:stretch>
-        </p:blipFill>
-        <p:spPr>
-          <a:xfrm>
-            <a:off x="2651760" y="640080"/>
-            <a:ext cx="3840480" cy="3840480"/>
-          </a:xfrm>
-          <a:prstGeom prst="rect">
-            <a:avLst/>
-          </a:prstGeom>
-        </p:spPr>
-      </p:pic>
+      <p:sp>
+        <p:nvSpPr>
+          <p:cNvPr id="2" name="Text 0"/>
+          <p:cNvSpPr/>
+          <p:nvPr/>
+        </p:nvSpPr>
+        <p:spPr>
+          <a:xfrm>
+            <a:off x="914400" y="1828800"/>
+            <a:ext cx="7315200" cy="1188720"/>
+          </a:xfrm>
+          <a:prstGeom prst="rect">
+            <a:avLst/>
+          </a:prstGeom>
+          <a:noFill/>
+          <a:ln/>
+        </p:spPr>
+        <p:txBody>
+          <a:bodyPr wrap="square" lIns="0" tIns="0" rIns="0" bIns="0" rtlCol="0" anchor="ctr">
+            <a:normAutofit/>
+          </a:bodyPr>
+          <a:lstStyle/>
+          <a:p>
+            <a:pPr algn="ctr" indent="0" marL="0">
+              <a:buNone/>
+            </a:pPr>
+            <a:r>
+              <a:rPr lang="en-US" sz="4400" b="1" dirty="0">
+                <a:solidFill>
+                  <a:srgbClr val="0B4F6C"/>
+                </a:solidFill>
+                <a:latin typeface="Verdana" pitchFamily="34" charset="0"/>
+                <a:ea typeface="Verdana" pitchFamily="34" charset="-122"/>
+                <a:cs typeface="Verdana" pitchFamily="34" charset="-120"/>
+              </a:rPr>
+              <a:t>Sun</a:t>
+            </a:r>
+            <a:endParaRPr lang="en-US" sz="4400" dirty="0"/>
+          </a:p>
+        </p:txBody>
+      </p:sp>
     </p:spTree>
   </p:cSld>
   <p:clrMapOvr>
@@ -5998,47 +6294,30 @@
           <a:chExt cx="0" cy="0"/>
         </a:xfrm>
       </p:grpSpPr>
-      <p:sp>
-        <p:nvSpPr>
-          <p:cNvPr id="2" name="Text 0"/>
-          <p:cNvSpPr/>
-          <p:nvPr/>
-        </p:nvSpPr>
-        <p:spPr>
-          <a:xfrm>
-            <a:off x="914400" y="1828800"/>
-            <a:ext cx="7315200" cy="1188720"/>
-          </a:xfrm>
-          <a:prstGeom prst="rect">
-            <a:avLst/>
-          </a:prstGeom>
-          <a:noFill/>
-          <a:ln/>
-        </p:spPr>
-        <p:txBody>
-          <a:bodyPr wrap="square" lIns="0" tIns="0" rIns="0" bIns="0" rtlCol="0" anchor="ctr">
-            <a:normAutofit/>
-          </a:bodyPr>
-          <a:lstStyle/>
-          <a:p>
-            <a:pPr algn="ctr" indent="0" marL="0">
-              <a:buNone/>
-            </a:pPr>
-            <a:r>
-              <a:rPr lang="en-US" sz="4400" b="1" dirty="0">
-                <a:solidFill>
-                  <a:srgbClr val="0B4F6C"/>
-                </a:solidFill>
-                <a:latin typeface="Verdana" pitchFamily="34" charset="0"/>
-                <a:ea typeface="Verdana" pitchFamily="34" charset="-122"/>
-                <a:cs typeface="Verdana" pitchFamily="34" charset="-120"/>
-              </a:rPr>
-              <a:t>Rain</a:t>
-            </a:r>
-            <a:endParaRPr lang="en-US" sz="4400" dirty="0"/>
-          </a:p>
-        </p:txBody>
-      </p:sp>
+      <p:pic>
+        <p:nvPicPr>
+          <p:cNvPr id="2" name="Image 0" descr="preencoded.png">    </p:cNvPr>
+          <p:cNvPicPr>
+            <a:picLocks noChangeAspect="1"/>
+          </p:cNvPicPr>
+          <p:nvPr/>
+        </p:nvPicPr>
+        <p:blipFill>
+          <a:blip r:embed="rId1"/>
+          <a:stretch>
+            <a:fillRect/>
+          </a:stretch>
+        </p:blipFill>
+        <p:spPr>
+          <a:xfrm>
+            <a:off x="2651760" y="640080"/>
+            <a:ext cx="3840480" cy="3840480"/>
+          </a:xfrm>
+          <a:prstGeom prst="rect">
+            <a:avLst/>
+          </a:prstGeom>
+        </p:spPr>
+      </p:pic>
     </p:spTree>
   </p:cSld>
   <p:clrMapOvr>
@@ -6071,30 +6350,47 @@
           <a:chExt cx="0" cy="0"/>
         </a:xfrm>
       </p:grpSpPr>
-      <p:pic>
-        <p:nvPicPr>
-          <p:cNvPr id="2" name="Image 0" descr="preencoded.png">    </p:cNvPr>
-          <p:cNvPicPr>
-            <a:picLocks noChangeAspect="1"/>
-          </p:cNvPicPr>
-          <p:nvPr/>
-        </p:nvPicPr>
-        <p:blipFill>
-          <a:blip r:embed="rId1"/>
-          <a:stretch>
-            <a:fillRect/>
-          </a:stretch>
-        </p:blipFill>
-        <p:spPr>
-          <a:xfrm>
-            <a:off x="2651760" y="640080"/>
-            <a:ext cx="3840480" cy="3840480"/>
-          </a:xfrm>
-          <a:prstGeom prst="rect">
-            <a:avLst/>
-          </a:prstGeom>
-        </p:spPr>
-      </p:pic>
+      <p:sp>
+        <p:nvSpPr>
+          <p:cNvPr id="2" name="Text 0"/>
+          <p:cNvSpPr/>
+          <p:nvPr/>
+        </p:nvSpPr>
+        <p:spPr>
+          <a:xfrm>
+            <a:off x="914400" y="1828800"/>
+            <a:ext cx="7315200" cy="1188720"/>
+          </a:xfrm>
+          <a:prstGeom prst="rect">
+            <a:avLst/>
+          </a:prstGeom>
+          <a:noFill/>
+          <a:ln/>
+        </p:spPr>
+        <p:txBody>
+          <a:bodyPr wrap="square" lIns="0" tIns="0" rIns="0" bIns="0" rtlCol="0" anchor="ctr">
+            <a:normAutofit/>
+          </a:bodyPr>
+          <a:lstStyle/>
+          <a:p>
+            <a:pPr algn="ctr" indent="0" marL="0">
+              <a:buNone/>
+            </a:pPr>
+            <a:r>
+              <a:rPr lang="en-US" sz="4400" b="1" dirty="0">
+                <a:solidFill>
+                  <a:srgbClr val="0B4F6C"/>
+                </a:solidFill>
+                <a:latin typeface="Verdana" pitchFamily="34" charset="0"/>
+                <a:ea typeface="Verdana" pitchFamily="34" charset="-122"/>
+                <a:cs typeface="Verdana" pitchFamily="34" charset="-120"/>
+              </a:rPr>
+              <a:t>Rain</a:t>
+            </a:r>
+            <a:endParaRPr lang="en-US" sz="4400" dirty="0"/>
+          </a:p>
+        </p:txBody>
+      </p:sp>
     </p:spTree>
   </p:cSld>
   <p:clrMapOvr>
@@ -6127,47 +6423,30 @@
           <a:chExt cx="0" cy="0"/>
         </a:xfrm>
       </p:grpSpPr>
-      <p:sp>
-        <p:nvSpPr>
-          <p:cNvPr id="2" name="Text 0"/>
-          <p:cNvSpPr/>
-          <p:nvPr/>
-        </p:nvSpPr>
-        <p:spPr>
-          <a:xfrm>
-            <a:off x="914400" y="1828800"/>
-            <a:ext cx="7315200" cy="1188720"/>
-          </a:xfrm>
-          <a:prstGeom prst="rect">
-            <a:avLst/>
-          </a:prstGeom>
-          <a:noFill/>
-          <a:ln/>
-        </p:spPr>
-        <p:txBody>
-          <a:bodyPr wrap="square" lIns="0" tIns="0" rIns="0" bIns="0" rtlCol="0" anchor="ctr">
-            <a:normAutofit/>
-          </a:bodyPr>
-          <a:lstStyle/>
-          <a:p>
-            <a:pPr algn="ctr" indent="0" marL="0">
-              <a:buNone/>
-            </a:pPr>
-            <a:r>
-              <a:rPr lang="en-US" sz="4400" b="1" dirty="0">
-                <a:solidFill>
-                  <a:srgbClr val="0B4F6C"/>
-                </a:solidFill>
-                <a:latin typeface="Verdana" pitchFamily="34" charset="0"/>
-                <a:ea typeface="Verdana" pitchFamily="34" charset="-122"/>
-                <a:cs typeface="Verdana" pitchFamily="34" charset="-120"/>
-              </a:rPr>
-              <a:t>Shirt</a:t>
-            </a:r>
-            <a:endParaRPr lang="en-US" sz="4400" dirty="0"/>
-          </a:p>
-        </p:txBody>
-      </p:sp>
+      <p:pic>
+        <p:nvPicPr>
+          <p:cNvPr id="2" name="Image 0" descr="preencoded.png">    </p:cNvPr>
+          <p:cNvPicPr>
+            <a:picLocks noChangeAspect="1"/>
+          </p:cNvPicPr>
+          <p:nvPr/>
+        </p:nvPicPr>
+        <p:blipFill>
+          <a:blip r:embed="rId1"/>
+          <a:stretch>
+            <a:fillRect/>
+          </a:stretch>
+        </p:blipFill>
+        <p:spPr>
+          <a:xfrm>
+            <a:off x="2651760" y="640080"/>
+            <a:ext cx="3840480" cy="3840480"/>
+          </a:xfrm>
+          <a:prstGeom prst="rect">
+            <a:avLst/>
+          </a:prstGeom>
+        </p:spPr>
+      </p:pic>
     </p:spTree>
   </p:cSld>
   <p:clrMapOvr>
@@ -6200,30 +6479,47 @@
           <a:chExt cx="0" cy="0"/>
         </a:xfrm>
       </p:grpSpPr>
-      <p:pic>
-        <p:nvPicPr>
-          <p:cNvPr id="2" name="Image 0" descr="preencoded.png">    </p:cNvPr>
-          <p:cNvPicPr>
-            <a:picLocks noChangeAspect="1"/>
-          </p:cNvPicPr>
-          <p:nvPr/>
-        </p:nvPicPr>
-        <p:blipFill>
-          <a:blip r:embed="rId1"/>
-          <a:stretch>
-            <a:fillRect/>
-          </a:stretch>
-        </p:blipFill>
-        <p:spPr>
-          <a:xfrm>
-            <a:off x="2651760" y="640080"/>
-            <a:ext cx="3840480" cy="3840480"/>
-          </a:xfrm>
-          <a:prstGeom prst="rect">
-            <a:avLst/>
-          </a:prstGeom>
-        </p:spPr>
-      </p:pic>
+      <p:sp>
+        <p:nvSpPr>
+          <p:cNvPr id="2" name="Text 0"/>
+          <p:cNvSpPr/>
+          <p:nvPr/>
+        </p:nvSpPr>
+        <p:spPr>
+          <a:xfrm>
+            <a:off x="914400" y="1828800"/>
+            <a:ext cx="7315200" cy="1188720"/>
+          </a:xfrm>
+          <a:prstGeom prst="rect">
+            <a:avLst/>
+          </a:prstGeom>
+          <a:noFill/>
+          <a:ln/>
+        </p:spPr>
+        <p:txBody>
+          <a:bodyPr wrap="square" lIns="0" tIns="0" rIns="0" bIns="0" rtlCol="0" anchor="ctr">
+            <a:normAutofit/>
+          </a:bodyPr>
+          <a:lstStyle/>
+          <a:p>
+            <a:pPr algn="ctr" indent="0" marL="0">
+              <a:buNone/>
+            </a:pPr>
+            <a:r>
+              <a:rPr lang="en-US" sz="4400" b="1" dirty="0">
+                <a:solidFill>
+                  <a:srgbClr val="0B4F6C"/>
+                </a:solidFill>
+                <a:latin typeface="Verdana" pitchFamily="34" charset="0"/>
+                <a:ea typeface="Verdana" pitchFamily="34" charset="-122"/>
+                <a:cs typeface="Verdana" pitchFamily="34" charset="-120"/>
+              </a:rPr>
+              <a:t>Shirt</a:t>
+            </a:r>
+            <a:endParaRPr lang="en-US" sz="4400" dirty="0"/>
+          </a:p>
+        </p:txBody>
+      </p:sp>
     </p:spTree>
   </p:cSld>
   <p:clrMapOvr>
@@ -6256,47 +6552,30 @@
           <a:chExt cx="0" cy="0"/>
         </a:xfrm>
       </p:grpSpPr>
-      <p:sp>
-        <p:nvSpPr>
-          <p:cNvPr id="2" name="Text 0"/>
-          <p:cNvSpPr/>
-          <p:nvPr/>
-        </p:nvSpPr>
-        <p:spPr>
-          <a:xfrm>
-            <a:off x="914400" y="1828800"/>
-            <a:ext cx="7315200" cy="1188720"/>
-          </a:xfrm>
-          <a:prstGeom prst="rect">
-            <a:avLst/>
-          </a:prstGeom>
-          <a:noFill/>
-          <a:ln/>
-        </p:spPr>
-        <p:txBody>
-          <a:bodyPr wrap="square" lIns="0" tIns="0" rIns="0" bIns="0" rtlCol="0" anchor="ctr">
-            <a:normAutofit/>
-          </a:bodyPr>
-          <a:lstStyle/>
-          <a:p>
-            <a:pPr algn="ctr" indent="0" marL="0">
-              <a:buNone/>
-            </a:pPr>
-            <a:r>
-              <a:rPr lang="en-US" sz="4400" b="1" dirty="0">
-                <a:solidFill>
-                  <a:srgbClr val="0B4F6C"/>
-                </a:solidFill>
-                <a:latin typeface="Verdana" pitchFamily="34" charset="0"/>
-                <a:ea typeface="Verdana" pitchFamily="34" charset="-122"/>
-                <a:cs typeface="Verdana" pitchFamily="34" charset="-120"/>
-              </a:rPr>
-              <a:t>Shoes</a:t>
-            </a:r>
-            <a:endParaRPr lang="en-US" sz="4400" dirty="0"/>
-          </a:p>
-        </p:txBody>
-      </p:sp>
+      <p:pic>
+        <p:nvPicPr>
+          <p:cNvPr id="2" name="Image 0" descr="preencoded.png">    </p:cNvPr>
+          <p:cNvPicPr>
+            <a:picLocks noChangeAspect="1"/>
+          </p:cNvPicPr>
+          <p:nvPr/>
+        </p:nvPicPr>
+        <p:blipFill>
+          <a:blip r:embed="rId1"/>
+          <a:stretch>
+            <a:fillRect/>
+          </a:stretch>
+        </p:blipFill>
+        <p:spPr>
+          <a:xfrm>
+            <a:off x="2651760" y="640080"/>
+            <a:ext cx="3840480" cy="3840480"/>
+          </a:xfrm>
+          <a:prstGeom prst="rect">
+            <a:avLst/>
+          </a:prstGeom>
+        </p:spPr>
+      </p:pic>
     </p:spTree>
   </p:cSld>
   <p:clrMapOvr>
@@ -6329,30 +6608,47 @@
           <a:chExt cx="0" cy="0"/>
         </a:xfrm>
       </p:grpSpPr>
-      <p:pic>
-        <p:nvPicPr>
-          <p:cNvPr id="2" name="Image 0" descr="preencoded.png">    </p:cNvPr>
-          <p:cNvPicPr>
-            <a:picLocks noChangeAspect="1"/>
-          </p:cNvPicPr>
-          <p:nvPr/>
-        </p:nvPicPr>
-        <p:blipFill>
-          <a:blip r:embed="rId1"/>
-          <a:stretch>
-            <a:fillRect/>
-          </a:stretch>
-        </p:blipFill>
-        <p:spPr>
-          <a:xfrm>
-            <a:off x="2651760" y="640080"/>
-            <a:ext cx="3840480" cy="3840480"/>
-          </a:xfrm>
-          <a:prstGeom prst="rect">
-            <a:avLst/>
-          </a:prstGeom>
-        </p:spPr>
-      </p:pic>
+      <p:sp>
+        <p:nvSpPr>
+          <p:cNvPr id="2" name="Text 0"/>
+          <p:cNvSpPr/>
+          <p:nvPr/>
+        </p:nvSpPr>
+        <p:spPr>
+          <a:xfrm>
+            <a:off x="914400" y="1828800"/>
+            <a:ext cx="7315200" cy="1188720"/>
+          </a:xfrm>
+          <a:prstGeom prst="rect">
+            <a:avLst/>
+          </a:prstGeom>
+          <a:noFill/>
+          <a:ln/>
+        </p:spPr>
+        <p:txBody>
+          <a:bodyPr wrap="square" lIns="0" tIns="0" rIns="0" bIns="0" rtlCol="0" anchor="ctr">
+            <a:normAutofit/>
+          </a:bodyPr>
+          <a:lstStyle/>
+          <a:p>
+            <a:pPr algn="ctr" indent="0" marL="0">
+              <a:buNone/>
+            </a:pPr>
+            <a:r>
+              <a:rPr lang="en-US" sz="4400" b="1" dirty="0">
+                <a:solidFill>
+                  <a:srgbClr val="0B4F6C"/>
+                </a:solidFill>
+                <a:latin typeface="Verdana" pitchFamily="34" charset="0"/>
+                <a:ea typeface="Verdana" pitchFamily="34" charset="-122"/>
+                <a:cs typeface="Verdana" pitchFamily="34" charset="-120"/>
+              </a:rPr>
+              <a:t>Shoes</a:t>
+            </a:r>
+            <a:endParaRPr lang="en-US" sz="4400" dirty="0"/>
+          </a:p>
+        </p:txBody>
+      </p:sp>
     </p:spTree>
   </p:cSld>
   <p:clrMapOvr>
@@ -6385,6 +6681,62 @@
           <a:chExt cx="0" cy="0"/>
         </a:xfrm>
       </p:grpSpPr>
+      <p:pic>
+        <p:nvPicPr>
+          <p:cNvPr id="2" name="Image 0" descr="preencoded.png">    </p:cNvPr>
+          <p:cNvPicPr>
+            <a:picLocks noChangeAspect="1"/>
+          </p:cNvPicPr>
+          <p:nvPr/>
+        </p:nvPicPr>
+        <p:blipFill>
+          <a:blip r:embed="rId1"/>
+          <a:stretch>
+            <a:fillRect/>
+          </a:stretch>
+        </p:blipFill>
+        <p:spPr>
+          <a:xfrm>
+            <a:off x="2651760" y="640080"/>
+            <a:ext cx="3840480" cy="3840480"/>
+          </a:xfrm>
+          <a:prstGeom prst="rect">
+            <a:avLst/>
+          </a:prstGeom>
+        </p:spPr>
+      </p:pic>
+    </p:spTree>
+  </p:cSld>
+  <p:clrMapOvr>
+    <a:masterClrMapping/>
+  </p:clrMapOvr>
+</p:sld>
+</file>
+
+<file path=ppt/slides/slide28.xml><?xml version="1.0" encoding="utf-8"?>
+<p:sld xmlns:a="http://schemas.openxmlformats.org/drawingml/2006/main" xmlns:r="http://schemas.openxmlformats.org/officeDocument/2006/relationships" xmlns:p="http://schemas.openxmlformats.org/presentationml/2006/main">
+  <p:cSld name="Slide 28">
+    <p:bg>
+      <p:bgPr>
+        <a:solidFill>
+          <a:srgbClr val="FFFFFF"/>
+        </a:solidFill>
+      </p:bgPr>
+    </p:bg>
+    <p:spTree>
+      <p:nvGrpSpPr>
+        <p:cNvPr id="1" name=""/>
+        <p:cNvGrpSpPr/>
+        <p:nvPr/>
+      </p:nvGrpSpPr>
+      <p:grpSpPr>
+        <a:xfrm>
+          <a:off x="0" y="0"/>
+          <a:ext cx="0" cy="0"/>
+          <a:chOff x="0" y="0"/>
+          <a:chExt cx="0" cy="0"/>
+        </a:xfrm>
+      </p:grpSpPr>
       <p:sp>
         <p:nvSpPr>
           <p:cNvPr id="2" name="Text 0"/>
@@ -6818,7 +7170,7 @@
                 <a:ea typeface="Trebuchet MS" pitchFamily="34" charset="-122"/>
                 <a:cs typeface="Trebuchet MS" pitchFamily="34" charset="-120"/>
               </a:rPr>
-              <a:t>Sun</a:t>
+              <a:t>Look and discuss</a:t>
             </a:r>
             <a:endParaRPr lang="en-US" sz="2400" dirty="0"/>
           </a:p>
@@ -6885,7 +7237,7 @@
                 <a:ea typeface="Verdana" pitchFamily="34" charset="-122"/>
                 <a:cs typeface="Verdana" pitchFamily="34" charset="-120"/>
               </a:rPr>
-              <a:t>The bright light in the sky.</a:t>
+              <a:t>Point to the sun.</a:t>
             </a:r>
             <a:endParaRPr lang="en-US" sz="1800" dirty="0"/>
           </a:p>
@@ -6900,7 +7252,7 @@
         <p:spPr>
           <a:xfrm>
             <a:off x="777240" y="1911096"/>
-            <a:ext cx="4005072" cy="310896"/>
+            <a:ext cx="4005072" cy="621792"/>
           </a:xfrm>
           <a:prstGeom prst="rect">
             <a:avLst/>
@@ -6927,29 +7279,7 @@
                 <a:ea typeface="Verdana" pitchFamily="34" charset="-122"/>
                 <a:cs typeface="Verdana" pitchFamily="34" charset="-120"/>
               </a:rPr>
-              <a:t>I see the </a:t>
-            </a:r>
-            <a:r>
-              <a:rPr lang="en-US" sz="1800" b="1" dirty="0">
-                <a:solidFill>
-                  <a:srgbClr val="D62828"/>
-                </a:solidFill>
-                <a:latin typeface="Verdana" pitchFamily="34" charset="0"/>
-                <a:ea typeface="Verdana" pitchFamily="34" charset="-122"/>
-                <a:cs typeface="Verdana" pitchFamily="34" charset="-120"/>
-              </a:rPr>
-              <a:t>sun</a:t>
-            </a:r>
-            <a:r>
-              <a:rPr lang="en-US" sz="1800" dirty="0">
-                <a:solidFill>
-                  <a:srgbClr val="20303A"/>
-                </a:solidFill>
-                <a:latin typeface="Verdana" pitchFamily="34" charset="0"/>
-                <a:ea typeface="Verdana" pitchFamily="34" charset="-122"/>
-                <a:cs typeface="Verdana" pitchFamily="34" charset="-120"/>
-              </a:rPr>
-              <a:t>.</a:t>
+              <a:t>Name two things the child wears.</a:t>
             </a:r>
             <a:endParaRPr lang="en-US" sz="1800" dirty="0"/>
           </a:p>
@@ -6971,8 +7301,8 @@
         </p:blipFill>
         <p:spPr>
           <a:xfrm>
-            <a:off x="5692140" y="1234440"/>
-            <a:ext cx="2606040" cy="2606040"/>
+            <a:off x="5349240" y="1440180"/>
+            <a:ext cx="3291840" cy="2194560"/>
           </a:xfrm>
           <a:prstGeom prst="rect">
             <a:avLst/>
@@ -6981,71 +7311,7 @@
       </p:pic>
       <p:sp>
         <p:nvSpPr>
-          <p:cNvPr id="8" name="Shape 5"/>
-          <p:cNvSpPr/>
-          <p:nvPr/>
-        </p:nvSpPr>
-        <p:spPr>
-          <a:xfrm>
-            <a:off x="502920" y="4069080"/>
-            <a:ext cx="8138160" cy="685800"/>
-          </a:xfrm>
-          <a:prstGeom prst="roundRect">
-            <a:avLst/>
-          </a:prstGeom>
-          <a:solidFill>
-            <a:srgbClr val="FFF3D6"/>
-          </a:solidFill>
-          <a:ln w="12700">
-            <a:solidFill>
-              <a:srgbClr val="F4A300"/>
-            </a:solidFill>
-            <a:prstDash val="solid"/>
-          </a:ln>
-        </p:spPr>
-      </p:sp>
-      <p:sp>
-        <p:nvSpPr>
-          <p:cNvPr id="9" name="Text 6"/>
-          <p:cNvSpPr/>
-          <p:nvPr/>
-        </p:nvSpPr>
-        <p:spPr>
-          <a:xfrm>
-            <a:off x="685800" y="4133088"/>
-            <a:ext cx="7772400" cy="566928"/>
-          </a:xfrm>
-          <a:prstGeom prst="rect">
-            <a:avLst/>
-          </a:prstGeom>
-          <a:noFill/>
-          <a:ln/>
-        </p:spPr>
-        <p:txBody>
-          <a:bodyPr wrap="square" lIns="0" tIns="0" rIns="0" bIns="0" rtlCol="0" anchor="ctr"/>
-          <a:lstStyle/>
-          <a:p>
-            <a:pPr algn="just" indent="0" marL="0">
-              <a:buNone/>
-            </a:pPr>
-            <a:r>
-              <a:rPr lang="en-US" sz="1200" b="1" dirty="0">
-                <a:solidFill>
-                  <a:srgbClr val="0B4F6C"/>
-                </a:solidFill>
-                <a:latin typeface="Verdana" pitchFamily="34" charset="0"/>
-                <a:ea typeface="Verdana" pitchFamily="34" charset="-122"/>
-                <a:cs typeface="Verdana" pitchFamily="34" charset="-120"/>
-              </a:rPr>
-              <a:t>Say the word.</a:t>
-            </a:r>
-            <a:endParaRPr lang="en-US" sz="1200" dirty="0"/>
-          </a:p>
-        </p:txBody>
-      </p:sp>
-      <p:sp>
-        <p:nvSpPr>
-          <p:cNvPr id="10" name="Text 7"/>
+          <p:cNvPr id="8" name="Text 5"/>
           <p:cNvSpPr/>
           <p:nvPr/>
         </p:nvSpPr>
@@ -7169,7 +7435,7 @@
                 <a:ea typeface="Trebuchet MS" pitchFamily="34" charset="-122"/>
                 <a:cs typeface="Trebuchet MS" pitchFamily="34" charset="-120"/>
               </a:rPr>
-              <a:t>Rain</a:t>
+              <a:t>Sun</a:t>
             </a:r>
             <a:endParaRPr lang="en-US" sz="2400" dirty="0"/>
           </a:p>
@@ -7236,7 +7502,7 @@
                 <a:ea typeface="Verdana" pitchFamily="34" charset="-122"/>
                 <a:cs typeface="Verdana" pitchFamily="34" charset="-120"/>
               </a:rPr>
-              <a:t>Water that falls from clouds.</a:t>
+              <a:t>The bright light in the sky.</a:t>
             </a:r>
             <a:endParaRPr lang="en-US" sz="1800" dirty="0"/>
           </a:p>
@@ -7289,7 +7555,7 @@
                 <a:ea typeface="Verdana" pitchFamily="34" charset="-122"/>
                 <a:cs typeface="Verdana" pitchFamily="34" charset="-120"/>
               </a:rPr>
-              <a:t>rain</a:t>
+              <a:t>sun</a:t>
             </a:r>
             <a:r>
               <a:rPr lang="en-US" sz="1800" dirty="0">
@@ -7520,7 +7786,7 @@
                 <a:ea typeface="Trebuchet MS" pitchFamily="34" charset="-122"/>
                 <a:cs typeface="Trebuchet MS" pitchFamily="34" charset="-120"/>
               </a:rPr>
-              <a:t>Shirt</a:t>
+              <a:t>Rain</a:t>
             </a:r>
             <a:endParaRPr lang="en-US" sz="2400" dirty="0"/>
           </a:p>
@@ -7560,7 +7826,7 @@
         <p:spPr>
           <a:xfrm>
             <a:off x="777240" y="1417320"/>
-            <a:ext cx="4005072" cy="621792"/>
+            <a:ext cx="4005072" cy="310896"/>
           </a:xfrm>
           <a:prstGeom prst="rect">
             <a:avLst/>
@@ -7587,7 +7853,7 @@
                 <a:ea typeface="Verdana" pitchFamily="34" charset="-122"/>
                 <a:cs typeface="Verdana" pitchFamily="34" charset="-120"/>
               </a:rPr>
-              <a:t>Clothes for the top of your body.</a:t>
+              <a:t>Water that falls from clouds.</a:t>
             </a:r>
             <a:endParaRPr lang="en-US" sz="1800" dirty="0"/>
           </a:p>
@@ -7601,7 +7867,7 @@
         </p:nvSpPr>
         <p:spPr>
           <a:xfrm>
-            <a:off x="777240" y="2221992"/>
+            <a:off x="777240" y="1911096"/>
             <a:ext cx="4005072" cy="310896"/>
           </a:xfrm>
           <a:prstGeom prst="rect">
@@ -7629,7 +7895,7 @@
                 <a:ea typeface="Verdana" pitchFamily="34" charset="-122"/>
                 <a:cs typeface="Verdana" pitchFamily="34" charset="-120"/>
               </a:rPr>
-              <a:t>My </a:t>
+              <a:t>I see the </a:t>
             </a:r>
             <a:r>
               <a:rPr lang="en-US" sz="1800" b="1" dirty="0">
@@ -7640,7 +7906,7 @@
                 <a:ea typeface="Verdana" pitchFamily="34" charset="-122"/>
                 <a:cs typeface="Verdana" pitchFamily="34" charset="-120"/>
               </a:rPr>
-              <a:t>shirt</a:t>
+              <a:t>rain</a:t>
             </a:r>
             <a:r>
               <a:rPr lang="en-US" sz="1800" dirty="0">
@@ -7651,7 +7917,7 @@
                 <a:ea typeface="Verdana" pitchFamily="34" charset="-122"/>
                 <a:cs typeface="Verdana" pitchFamily="34" charset="-120"/>
               </a:rPr>
-              <a:t> is blue.</a:t>
+              <a:t>.</a:t>
             </a:r>
             <a:endParaRPr lang="en-US" sz="1800" dirty="0"/>
           </a:p>
@@ -7871,7 +8137,7 @@
                 <a:ea typeface="Trebuchet MS" pitchFamily="34" charset="-122"/>
                 <a:cs typeface="Trebuchet MS" pitchFamily="34" charset="-120"/>
               </a:rPr>
-              <a:t>Shoes</a:t>
+              <a:t>Shirt</a:t>
             </a:r>
             <a:endParaRPr lang="en-US" sz="2400" dirty="0"/>
           </a:p>
@@ -7911,7 +8177,7 @@
         <p:spPr>
           <a:xfrm>
             <a:off x="777240" y="1417320"/>
-            <a:ext cx="4005072" cy="310896"/>
+            <a:ext cx="4005072" cy="621792"/>
           </a:xfrm>
           <a:prstGeom prst="rect">
             <a:avLst/>
@@ -7938,7 +8204,7 @@
                 <a:ea typeface="Verdana" pitchFamily="34" charset="-122"/>
                 <a:cs typeface="Verdana" pitchFamily="34" charset="-120"/>
               </a:rPr>
-              <a:t>Clothes for your feet.</a:t>
+              <a:t>Clothes for the top of your body.</a:t>
             </a:r>
             <a:endParaRPr lang="en-US" sz="1800" dirty="0"/>
           </a:p>
@@ -7952,7 +8218,7 @@
         </p:nvSpPr>
         <p:spPr>
           <a:xfrm>
-            <a:off x="777240" y="1911096"/>
+            <a:off x="777240" y="2221992"/>
             <a:ext cx="4005072" cy="310896"/>
           </a:xfrm>
           <a:prstGeom prst="rect">
@@ -7991,7 +8257,7 @@
                 <a:ea typeface="Verdana" pitchFamily="34" charset="-122"/>
                 <a:cs typeface="Verdana" pitchFamily="34" charset="-120"/>
               </a:rPr>
-              <a:t>shoes</a:t>
+              <a:t>shirt</a:t>
             </a:r>
             <a:r>
               <a:rPr lang="en-US" sz="1800" dirty="0">
@@ -8002,7 +8268,7 @@
                 <a:ea typeface="Verdana" pitchFamily="34" charset="-122"/>
                 <a:cs typeface="Verdana" pitchFamily="34" charset="-120"/>
               </a:rPr>
-              <a:t> are brown.</a:t>
+              <a:t> is blue.</a:t>
             </a:r>
             <a:endParaRPr lang="en-US" sz="1800" dirty="0"/>
           </a:p>
@@ -8222,7 +8488,7 @@
                 <a:ea typeface="Trebuchet MS" pitchFamily="34" charset="-122"/>
                 <a:cs typeface="Trebuchet MS" pitchFamily="34" charset="-120"/>
               </a:rPr>
-              <a:t>Hat</a:t>
+              <a:t>Shoes</a:t>
             </a:r>
             <a:endParaRPr lang="en-US" sz="2400" dirty="0"/>
           </a:p>
@@ -8262,7 +8528,7 @@
         <p:spPr>
           <a:xfrm>
             <a:off x="777240" y="1417320"/>
-            <a:ext cx="4005072" cy="621792"/>
+            <a:ext cx="4005072" cy="310896"/>
           </a:xfrm>
           <a:prstGeom prst="rect">
             <a:avLst/>
@@ -8289,7 +8555,7 @@
                 <a:ea typeface="Verdana" pitchFamily="34" charset="-122"/>
                 <a:cs typeface="Verdana" pitchFamily="34" charset="-120"/>
               </a:rPr>
-              <a:t>Something you wear on your head.</a:t>
+              <a:t>Clothes for your feet.</a:t>
             </a:r>
             <a:endParaRPr lang="en-US" sz="1800" dirty="0"/>
           </a:p>
@@ -8303,7 +8569,7 @@
         </p:nvSpPr>
         <p:spPr>
           <a:xfrm>
-            <a:off x="777240" y="2221992"/>
+            <a:off x="777240" y="1911096"/>
             <a:ext cx="4005072" cy="310896"/>
           </a:xfrm>
           <a:prstGeom prst="rect">
@@ -8342,7 +8608,7 @@
                 <a:ea typeface="Verdana" pitchFamily="34" charset="-122"/>
                 <a:cs typeface="Verdana" pitchFamily="34" charset="-120"/>
               </a:rPr>
-              <a:t>hat</a:t>
+              <a:t>shoes</a:t>
             </a:r>
             <a:r>
               <a:rPr lang="en-US" sz="1800" dirty="0">
@@ -8353,7 +8619,7 @@
                 <a:ea typeface="Verdana" pitchFamily="34" charset="-122"/>
                 <a:cs typeface="Verdana" pitchFamily="34" charset="-120"/>
               </a:rPr>
-              <a:t> is yellow.</a:t>
+              <a:t> are brown.</a:t>
             </a:r>
             <a:endParaRPr lang="en-US" sz="1800" dirty="0"/>
           </a:p>
@@ -8573,7 +8839,7 @@
                 <a:ea typeface="Trebuchet MS" pitchFamily="34" charset="-122"/>
                 <a:cs typeface="Trebuchet MS" pitchFamily="34" charset="-120"/>
               </a:rPr>
-              <a:t>Read and notice</a:t>
+              <a:t>Hat</a:t>
             </a:r>
             <a:endParaRPr lang="en-US" sz="2400" dirty="0"/>
           </a:p>
@@ -8588,7 +8854,7 @@
         <p:spPr>
           <a:xfrm>
             <a:off x="502920" y="1234440"/>
-            <a:ext cx="8138160" cy="2606040"/>
+            <a:ext cx="4553712" cy="2606040"/>
           </a:xfrm>
           <a:prstGeom prst="rect">
             <a:avLst/>
@@ -8613,7 +8879,7 @@
         <p:spPr>
           <a:xfrm>
             <a:off x="777240" y="1417320"/>
-            <a:ext cx="7589520" cy="310896"/>
+            <a:ext cx="4005072" cy="621792"/>
           </a:xfrm>
           <a:prstGeom prst="rect">
             <a:avLst/>
@@ -8640,7 +8906,7 @@
                 <a:ea typeface="Verdana" pitchFamily="34" charset="-122"/>
                 <a:cs typeface="Verdana" pitchFamily="34" charset="-120"/>
               </a:rPr>
-              <a:t>Mia Gets Ready</a:t>
+              <a:t>Something you wear on your head.</a:t>
             </a:r>
             <a:endParaRPr lang="en-US" sz="1800" dirty="0"/>
           </a:p>
@@ -8648,7 +8914,95 @@
       </p:sp>
       <p:sp>
         <p:nvSpPr>
-          <p:cNvPr id="6" name="Shape 4"/>
+          <p:cNvPr id="6" name="Text 4"/>
+          <p:cNvSpPr/>
+          <p:nvPr/>
+        </p:nvSpPr>
+        <p:spPr>
+          <a:xfrm>
+            <a:off x="777240" y="2221992"/>
+            <a:ext cx="4005072" cy="310896"/>
+          </a:xfrm>
+          <a:prstGeom prst="rect">
+            <a:avLst/>
+          </a:prstGeom>
+          <a:noFill/>
+          <a:ln/>
+        </p:spPr>
+        <p:txBody>
+          <a:bodyPr wrap="square" lIns="0" tIns="0" rIns="0" bIns="0" rtlCol="0" anchor="t"/>
+          <a:lstStyle/>
+          <a:p>
+            <a:pPr algn="just" indent="0" marL="0">
+              <a:lnSpc>
+                <a:spcPct val="100000"/>
+              </a:lnSpc>
+              <a:buNone/>
+            </a:pPr>
+            <a:r>
+              <a:rPr lang="en-US" sz="1800" dirty="0">
+                <a:solidFill>
+                  <a:srgbClr val="20303A"/>
+                </a:solidFill>
+                <a:latin typeface="Verdana" pitchFamily="34" charset="0"/>
+                <a:ea typeface="Verdana" pitchFamily="34" charset="-122"/>
+                <a:cs typeface="Verdana" pitchFamily="34" charset="-120"/>
+              </a:rPr>
+              <a:t>My </a:t>
+            </a:r>
+            <a:r>
+              <a:rPr lang="en-US" sz="1800" b="1" dirty="0">
+                <a:solidFill>
+                  <a:srgbClr val="D62828"/>
+                </a:solidFill>
+                <a:latin typeface="Verdana" pitchFamily="34" charset="0"/>
+                <a:ea typeface="Verdana" pitchFamily="34" charset="-122"/>
+                <a:cs typeface="Verdana" pitchFamily="34" charset="-120"/>
+              </a:rPr>
+              <a:t>hat</a:t>
+            </a:r>
+            <a:r>
+              <a:rPr lang="en-US" sz="1800" dirty="0">
+                <a:solidFill>
+                  <a:srgbClr val="20303A"/>
+                </a:solidFill>
+                <a:latin typeface="Verdana" pitchFamily="34" charset="0"/>
+                <a:ea typeface="Verdana" pitchFamily="34" charset="-122"/>
+                <a:cs typeface="Verdana" pitchFamily="34" charset="-120"/>
+              </a:rPr>
+              <a:t> is yellow.</a:t>
+            </a:r>
+            <a:endParaRPr lang="en-US" sz="1800" dirty="0"/>
+          </a:p>
+        </p:txBody>
+      </p:sp>
+      <p:pic>
+        <p:nvPicPr>
+          <p:cNvPr id="7" name="Image 0" descr="preencoded.png">    </p:cNvPr>
+          <p:cNvPicPr>
+            <a:picLocks noChangeAspect="1"/>
+          </p:cNvPicPr>
+          <p:nvPr/>
+        </p:nvPicPr>
+        <p:blipFill>
+          <a:blip r:embed="rId1"/>
+          <a:stretch>
+            <a:fillRect/>
+          </a:stretch>
+        </p:blipFill>
+        <p:spPr>
+          <a:xfrm>
+            <a:off x="5692140" y="1234440"/>
+            <a:ext cx="2606040" cy="2606040"/>
+          </a:xfrm>
+          <a:prstGeom prst="rect">
+            <a:avLst/>
+          </a:prstGeom>
+        </p:spPr>
+      </p:pic>
+      <p:sp>
+        <p:nvSpPr>
+          <p:cNvPr id="8" name="Shape 5"/>
           <p:cNvSpPr/>
           <p:nvPr/>
         </p:nvSpPr>
@@ -8673,7 +9027,7 @@
       </p:sp>
       <p:sp>
         <p:nvSpPr>
-          <p:cNvPr id="7" name="Text 5"/>
+          <p:cNvPr id="9" name="Text 6"/>
           <p:cNvSpPr/>
           <p:nvPr/>
         </p:nvSpPr>
@@ -8704,7 +9058,7 @@
                 <a:ea typeface="Verdana" pitchFamily="34" charset="-122"/>
                 <a:cs typeface="Verdana" pitchFamily="34" charset="-120"/>
               </a:rPr>
-              <a:t>What does Mia see first?</a:t>
+              <a:t>Say the word.</a:t>
             </a:r>
             <a:endParaRPr lang="en-US" sz="1200" dirty="0"/>
           </a:p>
@@ -8712,7 +9066,7 @@
       </p:sp>
       <p:sp>
         <p:nvSpPr>
-          <p:cNvPr id="8" name="Text 6"/>
+          <p:cNvPr id="10" name="Text 7"/>
           <p:cNvSpPr/>
           <p:nvPr/>
         </p:nvSpPr>
